--- a/planning/css.ch Webcrawler.pptx
+++ b/planning/css.ch Webcrawler.pptx
@@ -6,6 +6,15 @@
   </p:sldMasterIdLst>
   <p:sldIdLst>
     <p:sldId id="256" r:id="rId2"/>
+    <p:sldId id="258" r:id="rId3"/>
+    <p:sldId id="257" r:id="rId4"/>
+    <p:sldId id="259" r:id="rId5"/>
+    <p:sldId id="260" r:id="rId6"/>
+    <p:sldId id="261" r:id="rId7"/>
+    <p:sldId id="262" r:id="rId8"/>
+    <p:sldId id="263" r:id="rId9"/>
+    <p:sldId id="264" r:id="rId10"/>
+    <p:sldId id="265" r:id="rId11"/>
   </p:sldIdLst>
   <p:sldSz cx="12192000" cy="6858000"/>
   <p:notesSz cx="6858000" cy="9144000"/>
@@ -104,6 +113,11 @@
       </a:defRPr>
     </a:lvl9pPr>
   </p:defaultTextStyle>
+  <p:extLst>
+    <p:ext uri="{EFAFB233-063F-42B5-8137-9DF3F51BA10A}">
+      <p15:sldGuideLst xmlns:p15="http://schemas.microsoft.com/office/powerpoint/2012/main"/>
+    </p:ext>
+  </p:extLst>
 </p:presentation>
 </file>
 
@@ -256,7 +270,7 @@
           <a:p>
             <a:fld id="{9B3D177C-19DD-41C9-A48D-094522B769F7}" type="datetimeFigureOut">
               <a:rPr lang="de-CH" smtClean="0"/>
-              <a:t>01.06.2026</a:t>
+              <a:t>11.06.2026</a:t>
             </a:fld>
             <a:endParaRPr lang="de-CH"/>
           </a:p>
@@ -456,7 +470,7 @@
           <a:p>
             <a:fld id="{9B3D177C-19DD-41C9-A48D-094522B769F7}" type="datetimeFigureOut">
               <a:rPr lang="de-CH" smtClean="0"/>
-              <a:t>01.06.2026</a:t>
+              <a:t>11.06.2026</a:t>
             </a:fld>
             <a:endParaRPr lang="de-CH"/>
           </a:p>
@@ -666,7 +680,7 @@
           <a:p>
             <a:fld id="{9B3D177C-19DD-41C9-A48D-094522B769F7}" type="datetimeFigureOut">
               <a:rPr lang="de-CH" smtClean="0"/>
-              <a:t>01.06.2026</a:t>
+              <a:t>11.06.2026</a:t>
             </a:fld>
             <a:endParaRPr lang="de-CH"/>
           </a:p>
@@ -866,7 +880,7 @@
           <a:p>
             <a:fld id="{9B3D177C-19DD-41C9-A48D-094522B769F7}" type="datetimeFigureOut">
               <a:rPr lang="de-CH" smtClean="0"/>
-              <a:t>01.06.2026</a:t>
+              <a:t>11.06.2026</a:t>
             </a:fld>
             <a:endParaRPr lang="de-CH"/>
           </a:p>
@@ -1142,7 +1156,7 @@
           <a:p>
             <a:fld id="{9B3D177C-19DD-41C9-A48D-094522B769F7}" type="datetimeFigureOut">
               <a:rPr lang="de-CH" smtClean="0"/>
-              <a:t>01.06.2026</a:t>
+              <a:t>11.06.2026</a:t>
             </a:fld>
             <a:endParaRPr lang="de-CH"/>
           </a:p>
@@ -1410,7 +1424,7 @@
           <a:p>
             <a:fld id="{9B3D177C-19DD-41C9-A48D-094522B769F7}" type="datetimeFigureOut">
               <a:rPr lang="de-CH" smtClean="0"/>
-              <a:t>01.06.2026</a:t>
+              <a:t>11.06.2026</a:t>
             </a:fld>
             <a:endParaRPr lang="de-CH"/>
           </a:p>
@@ -1825,7 +1839,7 @@
           <a:p>
             <a:fld id="{9B3D177C-19DD-41C9-A48D-094522B769F7}" type="datetimeFigureOut">
               <a:rPr lang="de-CH" smtClean="0"/>
-              <a:t>01.06.2026</a:t>
+              <a:t>11.06.2026</a:t>
             </a:fld>
             <a:endParaRPr lang="de-CH"/>
           </a:p>
@@ -1967,7 +1981,7 @@
           <a:p>
             <a:fld id="{9B3D177C-19DD-41C9-A48D-094522B769F7}" type="datetimeFigureOut">
               <a:rPr lang="de-CH" smtClean="0"/>
-              <a:t>01.06.2026</a:t>
+              <a:t>11.06.2026</a:t>
             </a:fld>
             <a:endParaRPr lang="de-CH"/>
           </a:p>
@@ -2080,7 +2094,7 @@
           <a:p>
             <a:fld id="{9B3D177C-19DD-41C9-A48D-094522B769F7}" type="datetimeFigureOut">
               <a:rPr lang="de-CH" smtClean="0"/>
-              <a:t>01.06.2026</a:t>
+              <a:t>11.06.2026</a:t>
             </a:fld>
             <a:endParaRPr lang="de-CH"/>
           </a:p>
@@ -2393,7 +2407,7 @@
           <a:p>
             <a:fld id="{9B3D177C-19DD-41C9-A48D-094522B769F7}" type="datetimeFigureOut">
               <a:rPr lang="de-CH" smtClean="0"/>
-              <a:t>01.06.2026</a:t>
+              <a:t>11.06.2026</a:t>
             </a:fld>
             <a:endParaRPr lang="de-CH"/>
           </a:p>
@@ -2682,7 +2696,7 @@
           <a:p>
             <a:fld id="{9B3D177C-19DD-41C9-A48D-094522B769F7}" type="datetimeFigureOut">
               <a:rPr lang="de-CH" smtClean="0"/>
-              <a:t>01.06.2026</a:t>
+              <a:t>11.06.2026</a:t>
             </a:fld>
             <a:endParaRPr lang="de-CH"/>
           </a:p>
@@ -2925,7 +2939,7 @@
           <a:p>
             <a:fld id="{9B3D177C-19DD-41C9-A48D-094522B769F7}" type="datetimeFigureOut">
               <a:rPr lang="de-CH" smtClean="0"/>
-              <a:t>01.06.2026</a:t>
+              <a:t>11.06.2026</a:t>
             </a:fld>
             <a:endParaRPr lang="de-CH"/>
           </a:p>
@@ -3358,43 +3372,172 @@
             <p:ph type="ctrTitle"/>
           </p:nvPr>
         </p:nvSpPr>
+        <p:spPr>
+          <a:xfrm>
+            <a:off x="3600089" y="2507411"/>
+            <a:ext cx="6993148" cy="1094627"/>
+          </a:xfrm>
+        </p:spPr>
+        <p:txBody>
+          <a:bodyPr>
+            <a:normAutofit/>
+          </a:bodyPr>
+          <a:lstStyle/>
+          <a:p>
+            <a:r>
+              <a:rPr lang="de-DE" sz="7200" noProof="1">
+                <a:latin typeface="Aptos Black" panose="020B0004020202020204" pitchFamily="34" charset="0"/>
+              </a:rPr>
+              <a:t>.ch Webcrawler</a:t>
+            </a:r>
+          </a:p>
+        </p:txBody>
+      </p:sp>
+      <p:sp>
+        <p:nvSpPr>
+          <p:cNvPr id="3" name="Untertitel 2">
+            <a:extLst>
+              <a:ext uri="{FF2B5EF4-FFF2-40B4-BE49-F238E27FC236}">
+                <a16:creationId xmlns:a16="http://schemas.microsoft.com/office/drawing/2014/main" id="{DDC3D810-BE96-B42E-E541-F02E5334D018}"/>
+              </a:ext>
+            </a:extLst>
+          </p:cNvPr>
+          <p:cNvSpPr>
+            <a:spLocks noGrp="1"/>
+          </p:cNvSpPr>
+          <p:nvPr>
+            <p:ph type="subTitle" idx="1"/>
+          </p:nvPr>
+        </p:nvSpPr>
         <p:spPr/>
         <p:txBody>
           <a:bodyPr/>
           <a:lstStyle/>
           <a:p>
             <a:r>
-              <a:rPr lang="de-CH" dirty="0"/>
-              <a:t>css.ch Webcrawler</a:t>
-            </a:r>
-          </a:p>
-        </p:txBody>
-      </p:sp>
-      <p:sp>
-        <p:nvSpPr>
-          <p:cNvPr id="3" name="Untertitel 2">
-            <a:extLst>
-              <a:ext uri="{FF2B5EF4-FFF2-40B4-BE49-F238E27FC236}">
-                <a16:creationId xmlns:a16="http://schemas.microsoft.com/office/drawing/2014/main" id="{DDC3D810-BE96-B42E-E541-F02E5334D018}"/>
-              </a:ext>
-            </a:extLst>
-          </p:cNvPr>
-          <p:cNvSpPr>
-            <a:spLocks noGrp="1"/>
-          </p:cNvSpPr>
-          <p:nvPr>
-            <p:ph type="subTitle" idx="1"/>
-          </p:nvPr>
-        </p:nvSpPr>
-        <p:spPr/>
-        <p:txBody>
-          <a:bodyPr/>
-          <a:lstStyle/>
-          <a:p>
-            <a:r>
-              <a:rPr lang="de-CH" dirty="0"/>
+              <a:rPr lang="de-DE" noProof="1">
+                <a:latin typeface="Aptos Black" panose="020B0004020202020204" pitchFamily="34" charset="0"/>
+              </a:rPr>
               <a:t>Elio Bucher</a:t>
             </a:r>
+            <a:br>
+              <a:rPr lang="de-DE" noProof="1">
+                <a:latin typeface="Aptos Black" panose="020B0004020202020204" pitchFamily="34" charset="0"/>
+              </a:rPr>
+            </a:br>
+            <a:r>
+              <a:rPr lang="de-DE" noProof="1">
+                <a:latin typeface="Aptos Black" panose="020B0004020202020204" pitchFamily="34" charset="0"/>
+              </a:rPr>
+              <a:t>BBZW</a:t>
+            </a:r>
+            <a:br>
+              <a:rPr lang="de-DE" noProof="1">
+                <a:latin typeface="Aptos Black" panose="020B0004020202020204" pitchFamily="34" charset="0"/>
+              </a:rPr>
+            </a:br>
+            <a:r>
+              <a:rPr lang="de-DE" noProof="1">
+                <a:latin typeface="Aptos Black" panose="020B0004020202020204" pitchFamily="34" charset="0"/>
+              </a:rPr>
+              <a:t>M122</a:t>
+            </a:r>
+          </a:p>
+        </p:txBody>
+      </p:sp>
+      <p:pic>
+        <p:nvPicPr>
+          <p:cNvPr id="1026" name="Picture 2" descr="CSS (Versicherung) – Wikipedia">
+            <a:extLst>
+              <a:ext uri="{FF2B5EF4-FFF2-40B4-BE49-F238E27FC236}">
+                <a16:creationId xmlns:a16="http://schemas.microsoft.com/office/drawing/2014/main" id="{1DB66172-92CE-5915-91AF-9FB34DEE330E}"/>
+              </a:ext>
+            </a:extLst>
+          </p:cNvPr>
+          <p:cNvPicPr>
+            <a:picLocks noChangeAspect="1" noChangeArrowheads="1"/>
+          </p:cNvPicPr>
+          <p:nvPr/>
+        </p:nvPicPr>
+        <p:blipFill>
+          <a:blip r:embed="rId2">
+            <a:extLst>
+              <a:ext uri="{28A0092B-C50C-407E-A947-70E740481C1C}">
+                <a14:useLocalDpi xmlns:a14="http://schemas.microsoft.com/office/drawing/2010/main" val="0"/>
+              </a:ext>
+            </a:extLst>
+          </a:blip>
+          <a:srcRect/>
+          <a:stretch>
+            <a:fillRect/>
+          </a:stretch>
+        </p:blipFill>
+        <p:spPr bwMode="auto">
+          <a:xfrm>
+            <a:off x="1915063" y="2648568"/>
+            <a:ext cx="1692896" cy="722126"/>
+          </a:xfrm>
+          <a:prstGeom prst="rect">
+            <a:avLst/>
+          </a:prstGeom>
+          <a:noFill/>
+          <a:extLst>
+            <a:ext uri="{909E8E84-426E-40DD-AFC4-6F175D3DCCD1}">
+              <a14:hiddenFill xmlns:a14="http://schemas.microsoft.com/office/drawing/2010/main">
+                <a:solidFill>
+                  <a:srgbClr val="FFFFFF"/>
+                </a:solidFill>
+              </a14:hiddenFill>
+            </a:ext>
+          </a:extLst>
+        </p:spPr>
+      </p:pic>
+      <p:sp>
+        <p:nvSpPr>
+          <p:cNvPr id="5" name="Rechteck 4">
+            <a:extLst>
+              <a:ext uri="{FF2B5EF4-FFF2-40B4-BE49-F238E27FC236}">
+                <a16:creationId xmlns:a16="http://schemas.microsoft.com/office/drawing/2014/main" id="{756237AF-51E2-0727-1715-10C1683BABDD}"/>
+              </a:ext>
+            </a:extLst>
+          </p:cNvPr>
+          <p:cNvSpPr/>
+          <p:nvPr/>
+        </p:nvSpPr>
+        <p:spPr>
+          <a:xfrm>
+            <a:off x="8488392" y="0"/>
+            <a:ext cx="3703608" cy="2478657"/>
+          </a:xfrm>
+          <a:prstGeom prst="rect">
+            <a:avLst/>
+          </a:prstGeom>
+          <a:ln>
+            <a:noFill/>
+          </a:ln>
+        </p:spPr>
+        <p:style>
+          <a:lnRef idx="2">
+            <a:schemeClr val="accent1">
+              <a:shade val="15000"/>
+            </a:schemeClr>
+          </a:lnRef>
+          <a:fillRef idx="1">
+            <a:schemeClr val="accent1"/>
+          </a:fillRef>
+          <a:effectRef idx="0">
+            <a:schemeClr val="accent1"/>
+          </a:effectRef>
+          <a:fontRef idx="minor">
+            <a:schemeClr val="lt1"/>
+          </a:fontRef>
+        </p:style>
+        <p:txBody>
+          <a:bodyPr rtlCol="0" anchor="ctr"/>
+          <a:lstStyle/>
+          <a:p>
+            <a:pPr algn="ctr"/>
+            <a:endParaRPr lang="de-CH" dirty="0"/>
           </a:p>
         </p:txBody>
       </p:sp>
@@ -3402,6 +3545,1937 @@
     <p:extLst>
       <p:ext uri="{BB962C8B-B14F-4D97-AF65-F5344CB8AC3E}">
         <p14:creationId xmlns:p14="http://schemas.microsoft.com/office/powerpoint/2010/main" val="3259517400"/>
+      </p:ext>
+    </p:extLst>
+  </p:cSld>
+  <p:clrMapOvr>
+    <a:masterClrMapping/>
+  </p:clrMapOvr>
+</p:sld>
+</file>
+
+<file path=ppt/slides/slide10.xml><?xml version="1.0" encoding="utf-8"?>
+<p:sld xmlns:a="http://schemas.openxmlformats.org/drawingml/2006/main" xmlns:r="http://schemas.openxmlformats.org/officeDocument/2006/relationships" xmlns:p="http://schemas.openxmlformats.org/presentationml/2006/main">
+  <p:cSld>
+    <p:spTree>
+      <p:nvGrpSpPr>
+        <p:cNvPr id="1" name=""/>
+        <p:cNvGrpSpPr/>
+        <p:nvPr/>
+      </p:nvGrpSpPr>
+      <p:grpSpPr>
+        <a:xfrm>
+          <a:off x="0" y="0"/>
+          <a:ext cx="0" cy="0"/>
+          <a:chOff x="0" y="0"/>
+          <a:chExt cx="0" cy="0"/>
+        </a:xfrm>
+      </p:grpSpPr>
+      <p:sp>
+        <p:nvSpPr>
+          <p:cNvPr id="2" name="Titel 1">
+            <a:extLst>
+              <a:ext uri="{FF2B5EF4-FFF2-40B4-BE49-F238E27FC236}">
+                <a16:creationId xmlns:a16="http://schemas.microsoft.com/office/drawing/2014/main" id="{5AB6BF27-A267-682A-5B0A-6E460D5219AD}"/>
+              </a:ext>
+            </a:extLst>
+          </p:cNvPr>
+          <p:cNvSpPr>
+            <a:spLocks noGrp="1"/>
+          </p:cNvSpPr>
+          <p:nvPr>
+            <p:ph type="title"/>
+          </p:nvPr>
+        </p:nvSpPr>
+        <p:spPr/>
+        <p:txBody>
+          <a:bodyPr/>
+          <a:lstStyle/>
+          <a:p>
+            <a:r>
+              <a:rPr lang="de-DE" noProof="1">
+                <a:latin typeface="Aptos Black" panose="020B0004020202020204" pitchFamily="34" charset="0"/>
+              </a:rPr>
+              <a:t>Live Demo</a:t>
+            </a:r>
+          </a:p>
+        </p:txBody>
+      </p:sp>
+      <p:sp>
+        <p:nvSpPr>
+          <p:cNvPr id="3" name="Inhaltsplatzhalter 2">
+            <a:extLst>
+              <a:ext uri="{FF2B5EF4-FFF2-40B4-BE49-F238E27FC236}">
+                <a16:creationId xmlns:a16="http://schemas.microsoft.com/office/drawing/2014/main" id="{59FA3F15-0963-79E5-9664-62B9C2A6A7C6}"/>
+              </a:ext>
+            </a:extLst>
+          </p:cNvPr>
+          <p:cNvSpPr>
+            <a:spLocks noGrp="1"/>
+          </p:cNvSpPr>
+          <p:nvPr>
+            <p:ph idx="1"/>
+          </p:nvPr>
+        </p:nvSpPr>
+        <p:spPr/>
+        <p:txBody>
+          <a:bodyPr/>
+          <a:lstStyle/>
+          <a:p>
+            <a:endParaRPr lang="de-DE" noProof="1"/>
+          </a:p>
+        </p:txBody>
+      </p:sp>
+      <p:sp>
+        <p:nvSpPr>
+          <p:cNvPr id="7" name="Rechteck 6">
+            <a:extLst>
+              <a:ext uri="{FF2B5EF4-FFF2-40B4-BE49-F238E27FC236}">
+                <a16:creationId xmlns:a16="http://schemas.microsoft.com/office/drawing/2014/main" id="{00D91003-C658-2E0F-C674-8989B9796F31}"/>
+              </a:ext>
+            </a:extLst>
+          </p:cNvPr>
+          <p:cNvSpPr/>
+          <p:nvPr/>
+        </p:nvSpPr>
+        <p:spPr>
+          <a:xfrm>
+            <a:off x="8488392" y="0"/>
+            <a:ext cx="3703608" cy="2478657"/>
+          </a:xfrm>
+          <a:prstGeom prst="rect">
+            <a:avLst/>
+          </a:prstGeom>
+          <a:ln>
+            <a:noFill/>
+          </a:ln>
+        </p:spPr>
+        <p:style>
+          <a:lnRef idx="2">
+            <a:schemeClr val="accent1">
+              <a:shade val="15000"/>
+            </a:schemeClr>
+          </a:lnRef>
+          <a:fillRef idx="1">
+            <a:schemeClr val="accent1"/>
+          </a:fillRef>
+          <a:effectRef idx="0">
+            <a:schemeClr val="accent1"/>
+          </a:effectRef>
+          <a:fontRef idx="minor">
+            <a:schemeClr val="lt1"/>
+          </a:fontRef>
+        </p:style>
+        <p:txBody>
+          <a:bodyPr rtlCol="0" anchor="ctr"/>
+          <a:lstStyle/>
+          <a:p>
+            <a:pPr algn="ctr"/>
+            <a:endParaRPr lang="de-CH" dirty="0"/>
+          </a:p>
+        </p:txBody>
+      </p:sp>
+    </p:spTree>
+    <p:extLst>
+      <p:ext uri="{BB962C8B-B14F-4D97-AF65-F5344CB8AC3E}">
+        <p14:creationId xmlns:p14="http://schemas.microsoft.com/office/powerpoint/2010/main" val="541033095"/>
+      </p:ext>
+    </p:extLst>
+  </p:cSld>
+  <p:clrMapOvr>
+    <a:masterClrMapping/>
+  </p:clrMapOvr>
+</p:sld>
+</file>
+
+<file path=ppt/slides/slide2.xml><?xml version="1.0" encoding="utf-8"?>
+<p:sld xmlns:a="http://schemas.openxmlformats.org/drawingml/2006/main" xmlns:r="http://schemas.openxmlformats.org/officeDocument/2006/relationships" xmlns:p="http://schemas.openxmlformats.org/presentationml/2006/main">
+  <p:cSld>
+    <p:spTree>
+      <p:nvGrpSpPr>
+        <p:cNvPr id="1" name=""/>
+        <p:cNvGrpSpPr/>
+        <p:nvPr/>
+      </p:nvGrpSpPr>
+      <p:grpSpPr>
+        <a:xfrm>
+          <a:off x="0" y="0"/>
+          <a:ext cx="0" cy="0"/>
+          <a:chOff x="0" y="0"/>
+          <a:chExt cx="0" cy="0"/>
+        </a:xfrm>
+      </p:grpSpPr>
+      <p:sp>
+        <p:nvSpPr>
+          <p:cNvPr id="2" name="Titel 1">
+            <a:extLst>
+              <a:ext uri="{FF2B5EF4-FFF2-40B4-BE49-F238E27FC236}">
+                <a16:creationId xmlns:a16="http://schemas.microsoft.com/office/drawing/2014/main" id="{34EA5B63-9A2D-BB7C-27E8-F5BDBE815FE0}"/>
+              </a:ext>
+            </a:extLst>
+          </p:cNvPr>
+          <p:cNvSpPr>
+            <a:spLocks noGrp="1"/>
+          </p:cNvSpPr>
+          <p:nvPr>
+            <p:ph type="title"/>
+          </p:nvPr>
+        </p:nvSpPr>
+        <p:spPr/>
+        <p:txBody>
+          <a:bodyPr>
+            <a:normAutofit/>
+          </a:bodyPr>
+          <a:lstStyle/>
+          <a:p>
+            <a:r>
+              <a:rPr lang="de-DE" sz="4200" noProof="1">
+                <a:latin typeface="Aptos Black" panose="020B0004020202020204" pitchFamily="34" charset="0"/>
+              </a:rPr>
+              <a:t>Projektbeschrieb</a:t>
+            </a:r>
+          </a:p>
+        </p:txBody>
+      </p:sp>
+      <p:sp>
+        <p:nvSpPr>
+          <p:cNvPr id="3" name="Inhaltsplatzhalter 2">
+            <a:extLst>
+              <a:ext uri="{FF2B5EF4-FFF2-40B4-BE49-F238E27FC236}">
+                <a16:creationId xmlns:a16="http://schemas.microsoft.com/office/drawing/2014/main" id="{70AC2FB1-4C8B-5560-CA68-414DCAC12AF2}"/>
+              </a:ext>
+            </a:extLst>
+          </p:cNvPr>
+          <p:cNvSpPr>
+            <a:spLocks noGrp="1"/>
+          </p:cNvSpPr>
+          <p:nvPr>
+            <p:ph idx="1"/>
+          </p:nvPr>
+        </p:nvSpPr>
+        <p:spPr/>
+        <p:txBody>
+          <a:bodyPr>
+            <a:normAutofit/>
+          </a:bodyPr>
+          <a:lstStyle/>
+          <a:p>
+            <a:r>
+              <a:rPr lang="de-DE" sz="2600" noProof="1">
+                <a:latin typeface="Aptos Black" panose="020B0004020202020204" pitchFamily="34" charset="0"/>
+              </a:rPr>
+              <a:t>Bash-Skript, das css.ch automatisch crawlt </a:t>
+            </a:r>
+            <a:br>
+              <a:rPr lang="de-DE" sz="2600" noProof="1">
+                <a:latin typeface="Aptos Black" panose="020B0004020202020204" pitchFamily="34" charset="0"/>
+              </a:rPr>
+            </a:br>
+            <a:r>
+              <a:rPr lang="de-DE" sz="2600" noProof="1">
+                <a:latin typeface="Aptos Black" panose="020B0004020202020204" pitchFamily="34" charset="0"/>
+              </a:rPr>
+              <a:t>und alle gefundenen Links erfasst</a:t>
+            </a:r>
+          </a:p>
+          <a:p>
+            <a:r>
+              <a:rPr lang="de-DE" sz="2600" noProof="1">
+                <a:latin typeface="Aptos Black" panose="020B0004020202020204" pitchFamily="34" charset="0"/>
+              </a:rPr>
+              <a:t>Ergebnisse speichern</a:t>
+            </a:r>
+          </a:p>
+          <a:p>
+            <a:r>
+              <a:rPr lang="de-DE" sz="2600" noProof="1">
+                <a:latin typeface="Aptos Black" panose="020B0004020202020204" pitchFamily="34" charset="0"/>
+              </a:rPr>
+              <a:t>Doppelerfassung/Endlosschleifen erkennen und verhindern</a:t>
+            </a:r>
+          </a:p>
+          <a:p>
+            <a:r>
+              <a:rPr lang="de-DE" sz="2600" noProof="1">
+                <a:latin typeface="Aptos Black" panose="020B0004020202020204" pitchFamily="34" charset="0"/>
+              </a:rPr>
+              <a:t>Anzahl zu crawlende Seiten frei einstellbar</a:t>
+            </a:r>
+          </a:p>
+          <a:p>
+            <a:r>
+              <a:rPr lang="de-DE" sz="2600" noProof="1">
+                <a:latin typeface="Aptos Black" panose="020B0004020202020204" pitchFamily="34" charset="0"/>
+              </a:rPr>
+              <a:t>Dateitypen können vom Crawl ausgeschlossen werden</a:t>
+            </a:r>
+          </a:p>
+        </p:txBody>
+      </p:sp>
+      <p:sp>
+        <p:nvSpPr>
+          <p:cNvPr id="4" name="Rechteck 3">
+            <a:extLst>
+              <a:ext uri="{FF2B5EF4-FFF2-40B4-BE49-F238E27FC236}">
+                <a16:creationId xmlns:a16="http://schemas.microsoft.com/office/drawing/2014/main" id="{2B5BF01B-E7E0-9C36-8A5F-CDC575E1460B}"/>
+              </a:ext>
+            </a:extLst>
+          </p:cNvPr>
+          <p:cNvSpPr/>
+          <p:nvPr/>
+        </p:nvSpPr>
+        <p:spPr>
+          <a:xfrm>
+            <a:off x="8488392" y="0"/>
+            <a:ext cx="3703608" cy="2478657"/>
+          </a:xfrm>
+          <a:prstGeom prst="rect">
+            <a:avLst/>
+          </a:prstGeom>
+          <a:ln>
+            <a:noFill/>
+          </a:ln>
+        </p:spPr>
+        <p:style>
+          <a:lnRef idx="2">
+            <a:schemeClr val="accent1">
+              <a:shade val="15000"/>
+            </a:schemeClr>
+          </a:lnRef>
+          <a:fillRef idx="1">
+            <a:schemeClr val="accent1"/>
+          </a:fillRef>
+          <a:effectRef idx="0">
+            <a:schemeClr val="accent1"/>
+          </a:effectRef>
+          <a:fontRef idx="minor">
+            <a:schemeClr val="lt1"/>
+          </a:fontRef>
+        </p:style>
+        <p:txBody>
+          <a:bodyPr rtlCol="0" anchor="ctr"/>
+          <a:lstStyle/>
+          <a:p>
+            <a:pPr algn="ctr"/>
+            <a:endParaRPr lang="de-CH" dirty="0"/>
+          </a:p>
+        </p:txBody>
+      </p:sp>
+    </p:spTree>
+    <p:extLst>
+      <p:ext uri="{BB962C8B-B14F-4D97-AF65-F5344CB8AC3E}">
+        <p14:creationId xmlns:p14="http://schemas.microsoft.com/office/powerpoint/2010/main" val="1633688286"/>
+      </p:ext>
+    </p:extLst>
+  </p:cSld>
+  <p:clrMapOvr>
+    <a:masterClrMapping/>
+  </p:clrMapOvr>
+</p:sld>
+</file>
+
+<file path=ppt/slides/slide3.xml><?xml version="1.0" encoding="utf-8"?>
+<p:sld xmlns:a="http://schemas.openxmlformats.org/drawingml/2006/main" xmlns:r="http://schemas.openxmlformats.org/officeDocument/2006/relationships" xmlns:p="http://schemas.openxmlformats.org/presentationml/2006/main">
+  <p:cSld>
+    <p:spTree>
+      <p:nvGrpSpPr>
+        <p:cNvPr id="1" name=""/>
+        <p:cNvGrpSpPr/>
+        <p:nvPr/>
+      </p:nvGrpSpPr>
+      <p:grpSpPr>
+        <a:xfrm>
+          <a:off x="0" y="0"/>
+          <a:ext cx="0" cy="0"/>
+          <a:chOff x="0" y="0"/>
+          <a:chExt cx="0" cy="0"/>
+        </a:xfrm>
+      </p:grpSpPr>
+      <p:sp>
+        <p:nvSpPr>
+          <p:cNvPr id="2" name="Titel 1">
+            <a:extLst>
+              <a:ext uri="{FF2B5EF4-FFF2-40B4-BE49-F238E27FC236}">
+                <a16:creationId xmlns:a16="http://schemas.microsoft.com/office/drawing/2014/main" id="{F8F92FBA-608E-F858-EB83-AFFEDDC0B262}"/>
+              </a:ext>
+            </a:extLst>
+          </p:cNvPr>
+          <p:cNvSpPr>
+            <a:spLocks noGrp="1"/>
+          </p:cNvSpPr>
+          <p:nvPr>
+            <p:ph type="title"/>
+          </p:nvPr>
+        </p:nvSpPr>
+        <p:spPr/>
+        <p:txBody>
+          <a:bodyPr>
+            <a:normAutofit/>
+          </a:bodyPr>
+          <a:lstStyle/>
+          <a:p>
+            <a:r>
+              <a:rPr lang="de-DE" sz="4200" noProof="1">
+                <a:latin typeface="Aptos Black" panose="020B0004020202020204" pitchFamily="34" charset="0"/>
+              </a:rPr>
+              <a:t>Sinn und Zweck</a:t>
+            </a:r>
+          </a:p>
+        </p:txBody>
+      </p:sp>
+      <p:sp>
+        <p:nvSpPr>
+          <p:cNvPr id="3" name="Inhaltsplatzhalter 2">
+            <a:extLst>
+              <a:ext uri="{FF2B5EF4-FFF2-40B4-BE49-F238E27FC236}">
+                <a16:creationId xmlns:a16="http://schemas.microsoft.com/office/drawing/2014/main" id="{B271A556-8A2A-5550-1D0C-F9EFC2F2DBB5}"/>
+              </a:ext>
+            </a:extLst>
+          </p:cNvPr>
+          <p:cNvSpPr>
+            <a:spLocks noGrp="1"/>
+          </p:cNvSpPr>
+          <p:nvPr>
+            <p:ph idx="1"/>
+          </p:nvPr>
+        </p:nvSpPr>
+        <p:spPr/>
+        <p:txBody>
+          <a:bodyPr>
+            <a:normAutofit fontScale="92500" lnSpcReduction="10000"/>
+          </a:bodyPr>
+          <a:lstStyle/>
+          <a:p>
+            <a:r>
+              <a:rPr lang="de-DE" noProof="1">
+                <a:latin typeface="Aptos Black" panose="020B0004020202020204" pitchFamily="34" charset="0"/>
+              </a:rPr>
+              <a:t>Css.ch ist eine grosse Website</a:t>
+            </a:r>
+          </a:p>
+          <a:p>
+            <a:r>
+              <a:rPr lang="de-DE" noProof="1">
+                <a:latin typeface="Aptos Black" panose="020B0004020202020204" pitchFamily="34" charset="0"/>
+              </a:rPr>
+              <a:t>Ohne Automatisierung:</a:t>
+            </a:r>
+          </a:p>
+          <a:p>
+            <a:pPr lvl="1"/>
+            <a:r>
+              <a:rPr lang="de-DE" noProof="1">
+                <a:latin typeface="Aptos Black" panose="020B0004020202020204" pitchFamily="34" charset="0"/>
+              </a:rPr>
+              <a:t>Welche Seiten existieren?</a:t>
+            </a:r>
+          </a:p>
+          <a:p>
+            <a:pPr lvl="1"/>
+            <a:r>
+              <a:rPr lang="de-DE" noProof="1">
+                <a:latin typeface="Aptos Black" panose="020B0004020202020204" pitchFamily="34" charset="0"/>
+              </a:rPr>
+              <a:t>Hat sich etwas geändert?</a:t>
+            </a:r>
+          </a:p>
+          <a:p>
+            <a:pPr lvl="1"/>
+            <a:r>
+              <a:rPr lang="de-DE" noProof="1">
+                <a:latin typeface="Aptos Black" panose="020B0004020202020204" pitchFamily="34" charset="0"/>
+              </a:rPr>
+              <a:t>Wurden Seiten hinzugefügt oder entfernt?</a:t>
+            </a:r>
+          </a:p>
+          <a:p>
+            <a:r>
+              <a:rPr lang="de-DE" noProof="1">
+                <a:latin typeface="Aptos Black" panose="020B0004020202020204" pitchFamily="34" charset="0"/>
+              </a:rPr>
+              <a:t>Lösung:</a:t>
+            </a:r>
+          </a:p>
+          <a:p>
+            <a:pPr lvl="1"/>
+            <a:r>
+              <a:rPr lang="de-DE" noProof="1">
+                <a:latin typeface="Aptos Black" panose="020B0004020202020204" pitchFamily="34" charset="0"/>
+              </a:rPr>
+              <a:t>Alle URLs automatisch erfassen</a:t>
+            </a:r>
+          </a:p>
+          <a:p>
+            <a:pPr lvl="1"/>
+            <a:r>
+              <a:rPr lang="de-DE" noProof="1">
+                <a:latin typeface="Aptos Black" panose="020B0004020202020204" pitchFamily="34" charset="0"/>
+              </a:rPr>
+              <a:t>SHA-256 Hashes speichern, geänderte Seiten erkennen</a:t>
+            </a:r>
+          </a:p>
+          <a:p>
+            <a:pPr lvl="1"/>
+            <a:r>
+              <a:rPr lang="de-DE" noProof="1">
+                <a:latin typeface="Aptos Black" panose="020B0004020202020204" pitchFamily="34" charset="0"/>
+              </a:rPr>
+              <a:t>Kein manueller Aufwand</a:t>
+            </a:r>
+          </a:p>
+          <a:p>
+            <a:r>
+              <a:rPr lang="de-DE" noProof="1">
+                <a:latin typeface="Aptos Black" panose="020B0004020202020204" pitchFamily="34" charset="0"/>
+              </a:rPr>
+              <a:t>Ziel:</a:t>
+            </a:r>
+          </a:p>
+          <a:p>
+            <a:pPr lvl="1"/>
+            <a:r>
+              <a:rPr lang="de-DE" noProof="1">
+                <a:latin typeface="Aptos Black" panose="020B0004020202020204" pitchFamily="34" charset="0"/>
+              </a:rPr>
+              <a:t>Auftraggeber soll jederzeit wissen, was auf css.ch existiert und was sich verändert hat</a:t>
+            </a:r>
+          </a:p>
+        </p:txBody>
+      </p:sp>
+      <p:sp>
+        <p:nvSpPr>
+          <p:cNvPr id="7" name="Rechteck 6">
+            <a:extLst>
+              <a:ext uri="{FF2B5EF4-FFF2-40B4-BE49-F238E27FC236}">
+                <a16:creationId xmlns:a16="http://schemas.microsoft.com/office/drawing/2014/main" id="{C3157218-CEA8-4D85-6283-5A72BFE0FEA1}"/>
+              </a:ext>
+            </a:extLst>
+          </p:cNvPr>
+          <p:cNvSpPr/>
+          <p:nvPr/>
+        </p:nvSpPr>
+        <p:spPr>
+          <a:xfrm>
+            <a:off x="8488392" y="0"/>
+            <a:ext cx="3703608" cy="2478657"/>
+          </a:xfrm>
+          <a:prstGeom prst="rect">
+            <a:avLst/>
+          </a:prstGeom>
+          <a:ln>
+            <a:noFill/>
+          </a:ln>
+        </p:spPr>
+        <p:style>
+          <a:lnRef idx="2">
+            <a:schemeClr val="accent1">
+              <a:shade val="15000"/>
+            </a:schemeClr>
+          </a:lnRef>
+          <a:fillRef idx="1">
+            <a:schemeClr val="accent1"/>
+          </a:fillRef>
+          <a:effectRef idx="0">
+            <a:schemeClr val="accent1"/>
+          </a:effectRef>
+          <a:fontRef idx="minor">
+            <a:schemeClr val="lt1"/>
+          </a:fontRef>
+        </p:style>
+        <p:txBody>
+          <a:bodyPr rtlCol="0" anchor="ctr"/>
+          <a:lstStyle/>
+          <a:p>
+            <a:pPr algn="ctr"/>
+            <a:endParaRPr lang="de-CH" dirty="0"/>
+          </a:p>
+        </p:txBody>
+      </p:sp>
+    </p:spTree>
+    <p:extLst>
+      <p:ext uri="{BB962C8B-B14F-4D97-AF65-F5344CB8AC3E}">
+        <p14:creationId xmlns:p14="http://schemas.microsoft.com/office/powerpoint/2010/main" val="3935814778"/>
+      </p:ext>
+    </p:extLst>
+  </p:cSld>
+  <p:clrMapOvr>
+    <a:masterClrMapping/>
+  </p:clrMapOvr>
+</p:sld>
+</file>
+
+<file path=ppt/slides/slide4.xml><?xml version="1.0" encoding="utf-8"?>
+<p:sld xmlns:a="http://schemas.openxmlformats.org/drawingml/2006/main" xmlns:r="http://schemas.openxmlformats.org/officeDocument/2006/relationships" xmlns:p="http://schemas.openxmlformats.org/presentationml/2006/main">
+  <p:cSld>
+    <p:spTree>
+      <p:nvGrpSpPr>
+        <p:cNvPr id="1" name=""/>
+        <p:cNvGrpSpPr/>
+        <p:nvPr/>
+      </p:nvGrpSpPr>
+      <p:grpSpPr>
+        <a:xfrm>
+          <a:off x="0" y="0"/>
+          <a:ext cx="0" cy="0"/>
+          <a:chOff x="0" y="0"/>
+          <a:chExt cx="0" cy="0"/>
+        </a:xfrm>
+      </p:grpSpPr>
+      <p:sp>
+        <p:nvSpPr>
+          <p:cNvPr id="2" name="Titel 1">
+            <a:extLst>
+              <a:ext uri="{FF2B5EF4-FFF2-40B4-BE49-F238E27FC236}">
+                <a16:creationId xmlns:a16="http://schemas.microsoft.com/office/drawing/2014/main" id="{9DC28531-261A-B74C-C420-4CC94DBAE244}"/>
+              </a:ext>
+            </a:extLst>
+          </p:cNvPr>
+          <p:cNvSpPr>
+            <a:spLocks noGrp="1"/>
+          </p:cNvSpPr>
+          <p:nvPr>
+            <p:ph type="title"/>
+          </p:nvPr>
+        </p:nvSpPr>
+        <p:spPr/>
+        <p:txBody>
+          <a:bodyPr>
+            <a:normAutofit/>
+          </a:bodyPr>
+          <a:lstStyle/>
+          <a:p>
+            <a:r>
+              <a:rPr lang="de-DE" sz="4200" noProof="1">
+                <a:latin typeface="Aptos Black" panose="020B0004020202020204" pitchFamily="34" charset="0"/>
+              </a:rPr>
+              <a:t>Flowchart zeigen</a:t>
+            </a:r>
+          </a:p>
+        </p:txBody>
+      </p:sp>
+      <p:sp>
+        <p:nvSpPr>
+          <p:cNvPr id="3" name="Inhaltsplatzhalter 2">
+            <a:extLst>
+              <a:ext uri="{FF2B5EF4-FFF2-40B4-BE49-F238E27FC236}">
+                <a16:creationId xmlns:a16="http://schemas.microsoft.com/office/drawing/2014/main" id="{7DCDAA2D-B55C-5AC3-0B47-90F4D5AB4562}"/>
+              </a:ext>
+            </a:extLst>
+          </p:cNvPr>
+          <p:cNvSpPr>
+            <a:spLocks noGrp="1"/>
+          </p:cNvSpPr>
+          <p:nvPr>
+            <p:ph idx="1"/>
+          </p:nvPr>
+        </p:nvSpPr>
+        <p:spPr/>
+        <p:txBody>
+          <a:bodyPr/>
+          <a:lstStyle/>
+          <a:p>
+            <a:endParaRPr lang="de-DE" noProof="1"/>
+          </a:p>
+        </p:txBody>
+      </p:sp>
+      <p:sp>
+        <p:nvSpPr>
+          <p:cNvPr id="7" name="Rechteck 6">
+            <a:extLst>
+              <a:ext uri="{FF2B5EF4-FFF2-40B4-BE49-F238E27FC236}">
+                <a16:creationId xmlns:a16="http://schemas.microsoft.com/office/drawing/2014/main" id="{9D105243-93F4-A1FC-823E-5A1758FF9A13}"/>
+              </a:ext>
+            </a:extLst>
+          </p:cNvPr>
+          <p:cNvSpPr/>
+          <p:nvPr/>
+        </p:nvSpPr>
+        <p:spPr>
+          <a:xfrm>
+            <a:off x="8488392" y="0"/>
+            <a:ext cx="3703608" cy="2478657"/>
+          </a:xfrm>
+          <a:prstGeom prst="rect">
+            <a:avLst/>
+          </a:prstGeom>
+          <a:ln>
+            <a:noFill/>
+          </a:ln>
+        </p:spPr>
+        <p:style>
+          <a:lnRef idx="2">
+            <a:schemeClr val="accent1">
+              <a:shade val="15000"/>
+            </a:schemeClr>
+          </a:lnRef>
+          <a:fillRef idx="1">
+            <a:schemeClr val="accent1"/>
+          </a:fillRef>
+          <a:effectRef idx="0">
+            <a:schemeClr val="accent1"/>
+          </a:effectRef>
+          <a:fontRef idx="minor">
+            <a:schemeClr val="lt1"/>
+          </a:fontRef>
+        </p:style>
+        <p:txBody>
+          <a:bodyPr rtlCol="0" anchor="ctr"/>
+          <a:lstStyle/>
+          <a:p>
+            <a:pPr algn="ctr"/>
+            <a:endParaRPr lang="de-CH" dirty="0"/>
+          </a:p>
+        </p:txBody>
+      </p:sp>
+    </p:spTree>
+    <p:extLst>
+      <p:ext uri="{BB962C8B-B14F-4D97-AF65-F5344CB8AC3E}">
+        <p14:creationId xmlns:p14="http://schemas.microsoft.com/office/powerpoint/2010/main" val="2294189952"/>
+      </p:ext>
+    </p:extLst>
+  </p:cSld>
+  <p:clrMapOvr>
+    <a:masterClrMapping/>
+  </p:clrMapOvr>
+</p:sld>
+</file>
+
+<file path=ppt/slides/slide5.xml><?xml version="1.0" encoding="utf-8"?>
+<p:sld xmlns:a="http://schemas.openxmlformats.org/drawingml/2006/main" xmlns:r="http://schemas.openxmlformats.org/officeDocument/2006/relationships" xmlns:p="http://schemas.openxmlformats.org/presentationml/2006/main">
+  <p:cSld>
+    <p:spTree>
+      <p:nvGrpSpPr>
+        <p:cNvPr id="1" name=""/>
+        <p:cNvGrpSpPr/>
+        <p:nvPr/>
+      </p:nvGrpSpPr>
+      <p:grpSpPr>
+        <a:xfrm>
+          <a:off x="0" y="0"/>
+          <a:ext cx="0" cy="0"/>
+          <a:chOff x="0" y="0"/>
+          <a:chExt cx="0" cy="0"/>
+        </a:xfrm>
+      </p:grpSpPr>
+      <p:sp>
+        <p:nvSpPr>
+          <p:cNvPr id="2" name="Titel 1">
+            <a:extLst>
+              <a:ext uri="{FF2B5EF4-FFF2-40B4-BE49-F238E27FC236}">
+                <a16:creationId xmlns:a16="http://schemas.microsoft.com/office/drawing/2014/main" id="{EFFD31FF-ECFC-5BF9-3BAE-181B724B9D85}"/>
+              </a:ext>
+            </a:extLst>
+          </p:cNvPr>
+          <p:cNvSpPr>
+            <a:spLocks noGrp="1"/>
+          </p:cNvSpPr>
+          <p:nvPr>
+            <p:ph type="title"/>
+          </p:nvPr>
+        </p:nvSpPr>
+        <p:spPr/>
+        <p:txBody>
+          <a:bodyPr>
+            <a:normAutofit/>
+          </a:bodyPr>
+          <a:lstStyle/>
+          <a:p>
+            <a:r>
+              <a:rPr lang="de-DE" sz="4200" noProof="1">
+                <a:latin typeface="Aptos Black" panose="020B0004020202020204" pitchFamily="34" charset="0"/>
+              </a:rPr>
+              <a:t>Relevante Code-Stellen</a:t>
+            </a:r>
+          </a:p>
+        </p:txBody>
+      </p:sp>
+      <p:sp>
+        <p:nvSpPr>
+          <p:cNvPr id="8" name="Rechteck 7">
+            <a:extLst>
+              <a:ext uri="{FF2B5EF4-FFF2-40B4-BE49-F238E27FC236}">
+                <a16:creationId xmlns:a16="http://schemas.microsoft.com/office/drawing/2014/main" id="{C520D6F4-F679-FEAD-7F5D-934E947EF488}"/>
+              </a:ext>
+            </a:extLst>
+          </p:cNvPr>
+          <p:cNvSpPr/>
+          <p:nvPr/>
+        </p:nvSpPr>
+        <p:spPr>
+          <a:xfrm>
+            <a:off x="8488392" y="0"/>
+            <a:ext cx="3703608" cy="2478657"/>
+          </a:xfrm>
+          <a:prstGeom prst="rect">
+            <a:avLst/>
+          </a:prstGeom>
+          <a:ln>
+            <a:noFill/>
+          </a:ln>
+        </p:spPr>
+        <p:style>
+          <a:lnRef idx="2">
+            <a:schemeClr val="accent1">
+              <a:shade val="15000"/>
+            </a:schemeClr>
+          </a:lnRef>
+          <a:fillRef idx="1">
+            <a:schemeClr val="accent1"/>
+          </a:fillRef>
+          <a:effectRef idx="0">
+            <a:schemeClr val="accent1"/>
+          </a:effectRef>
+          <a:fontRef idx="minor">
+            <a:schemeClr val="lt1"/>
+          </a:fontRef>
+        </p:style>
+        <p:txBody>
+          <a:bodyPr rtlCol="0" anchor="ctr"/>
+          <a:lstStyle/>
+          <a:p>
+            <a:pPr algn="ctr"/>
+            <a:endParaRPr lang="de-CH" dirty="0"/>
+          </a:p>
+        </p:txBody>
+      </p:sp>
+    </p:spTree>
+    <p:extLst>
+      <p:ext uri="{BB962C8B-B14F-4D97-AF65-F5344CB8AC3E}">
+        <p14:creationId xmlns:p14="http://schemas.microsoft.com/office/powerpoint/2010/main" val="1121876247"/>
+      </p:ext>
+    </p:extLst>
+  </p:cSld>
+  <p:clrMapOvr>
+    <a:masterClrMapping/>
+  </p:clrMapOvr>
+</p:sld>
+</file>
+
+<file path=ppt/slides/slide6.xml><?xml version="1.0" encoding="utf-8"?>
+<p:sld xmlns:a="http://schemas.openxmlformats.org/drawingml/2006/main" xmlns:r="http://schemas.openxmlformats.org/officeDocument/2006/relationships" xmlns:p="http://schemas.openxmlformats.org/presentationml/2006/main">
+  <p:cSld>
+    <p:spTree>
+      <p:nvGrpSpPr>
+        <p:cNvPr id="1" name=""/>
+        <p:cNvGrpSpPr/>
+        <p:nvPr/>
+      </p:nvGrpSpPr>
+      <p:grpSpPr>
+        <a:xfrm>
+          <a:off x="0" y="0"/>
+          <a:ext cx="0" cy="0"/>
+          <a:chOff x="0" y="0"/>
+          <a:chExt cx="0" cy="0"/>
+        </a:xfrm>
+      </p:grpSpPr>
+      <p:sp>
+        <p:nvSpPr>
+          <p:cNvPr id="2" name="Titel 1">
+            <a:extLst>
+              <a:ext uri="{FF2B5EF4-FFF2-40B4-BE49-F238E27FC236}">
+                <a16:creationId xmlns:a16="http://schemas.microsoft.com/office/drawing/2014/main" id="{BE93B147-3274-34D3-EBE5-FE4B803BD0BB}"/>
+              </a:ext>
+            </a:extLst>
+          </p:cNvPr>
+          <p:cNvSpPr>
+            <a:spLocks noGrp="1"/>
+          </p:cNvSpPr>
+          <p:nvPr>
+            <p:ph type="title"/>
+          </p:nvPr>
+        </p:nvSpPr>
+        <p:spPr/>
+        <p:txBody>
+          <a:bodyPr>
+            <a:normAutofit/>
+          </a:bodyPr>
+          <a:lstStyle/>
+          <a:p>
+            <a:r>
+              <a:rPr lang="de-DE" sz="4200" noProof="1">
+                <a:latin typeface="Aptos Black" panose="020B0004020202020204" pitchFamily="34" charset="0"/>
+              </a:rPr>
+              <a:t>Doppel- und Loop-Erkennung</a:t>
+            </a:r>
+          </a:p>
+        </p:txBody>
+      </p:sp>
+      <p:sp>
+        <p:nvSpPr>
+          <p:cNvPr id="3" name="Inhaltsplatzhalter 2">
+            <a:extLst>
+              <a:ext uri="{FF2B5EF4-FFF2-40B4-BE49-F238E27FC236}">
+                <a16:creationId xmlns:a16="http://schemas.microsoft.com/office/drawing/2014/main" id="{EF295F60-7B0A-9CA5-6916-204260694D84}"/>
+              </a:ext>
+            </a:extLst>
+          </p:cNvPr>
+          <p:cNvSpPr>
+            <a:spLocks noGrp="1"/>
+          </p:cNvSpPr>
+          <p:nvPr>
+            <p:ph idx="1"/>
+          </p:nvPr>
+        </p:nvSpPr>
+        <p:spPr>
+          <a:xfrm>
+            <a:off x="838200" y="2162332"/>
+            <a:ext cx="10515600" cy="4351338"/>
+          </a:xfrm>
+        </p:spPr>
+        <p:txBody>
+          <a:bodyPr/>
+          <a:lstStyle/>
+          <a:p>
+            <a:pPr marL="0" indent="0">
+              <a:buNone/>
+            </a:pPr>
+            <a:r>
+              <a:rPr lang="de-DE" noProof="1">
+                <a:latin typeface="Courier New" pitchFamily="34" charset="0"/>
+                <a:ea typeface="Courier New" pitchFamily="34" charset="-122"/>
+                <a:cs typeface="Courier New" pitchFamily="34" charset="-120"/>
+              </a:rPr>
+              <a:t>is_valid_url(){</a:t>
+            </a:r>
+            <a:r>
+              <a:rPr lang="de-DE" noProof="1">
+                <a:solidFill>
+                  <a:srgbClr val="E6EDF3"/>
+                </a:solidFill>
+                <a:latin typeface="Courier New" pitchFamily="34" charset="0"/>
+                <a:ea typeface="Courier New" pitchFamily="34" charset="-122"/>
+                <a:cs typeface="Courier New" pitchFamily="34" charset="-120"/>
+              </a:rPr>
+              <a:t>
+</a:t>
+            </a:r>
+            <a:r>
+              <a:rPr lang="de-DE" noProof="1">
+                <a:solidFill>
+                  <a:srgbClr val="3FB950"/>
+                </a:solidFill>
+                <a:latin typeface="Courier New" pitchFamily="34" charset="0"/>
+                <a:ea typeface="Courier New" pitchFamily="34" charset="-122"/>
+                <a:cs typeface="Courier New" pitchFamily="34" charset="-120"/>
+              </a:rPr>
+              <a:t>  is_visited "$url"</a:t>
+            </a:r>
+            <a:r>
+              <a:rPr lang="de-DE" noProof="1">
+                <a:solidFill>
+                  <a:srgbClr val="E6EDF3"/>
+                </a:solidFill>
+                <a:latin typeface="Courier New" pitchFamily="34" charset="0"/>
+                <a:ea typeface="Courier New" pitchFamily="34" charset="-122"/>
+                <a:cs typeface="Courier New" pitchFamily="34" charset="-120"/>
+              </a:rPr>
+              <a:t> </a:t>
+            </a:r>
+            <a:r>
+              <a:rPr lang="de-DE" noProof="1">
+                <a:latin typeface="Courier New" pitchFamily="34" charset="0"/>
+                <a:ea typeface="Courier New" pitchFamily="34" charset="-122"/>
+                <a:cs typeface="Courier New" pitchFamily="34" charset="-120"/>
+              </a:rPr>
+              <a:t>&amp;&amp; return 1</a:t>
+            </a:r>
+            <a:r>
+              <a:rPr lang="de-DE" noProof="1">
+                <a:solidFill>
+                  <a:srgbClr val="8B949E"/>
+                </a:solidFill>
+                <a:latin typeface="Courier New" pitchFamily="34" charset="0"/>
+                <a:ea typeface="Courier New" pitchFamily="34" charset="-122"/>
+                <a:cs typeface="Courier New" pitchFamily="34" charset="-120"/>
+              </a:rPr>
+              <a:t>
+</a:t>
+            </a:r>
+            <a:r>
+              <a:rPr lang="de-DE" noProof="1">
+                <a:latin typeface="Courier New" pitchFamily="34" charset="0"/>
+                <a:ea typeface="Courier New" pitchFamily="34" charset="-122"/>
+                <a:cs typeface="Courier New" pitchFamily="34" charset="-120"/>
+              </a:rPr>
+              <a:t>  [[ "$host" == *".$DOMAIN" ]] || return 1
+  return 0
+}</a:t>
+            </a:r>
+            <a:endParaRPr lang="de-DE" noProof="1"/>
+          </a:p>
+          <a:p>
+            <a:pPr marL="0" indent="0">
+              <a:buNone/>
+            </a:pPr>
+            <a:endParaRPr lang="de-DE" noProof="1"/>
+          </a:p>
+        </p:txBody>
+      </p:sp>
+      <p:sp>
+        <p:nvSpPr>
+          <p:cNvPr id="7" name="Rechteck 6">
+            <a:extLst>
+              <a:ext uri="{FF2B5EF4-FFF2-40B4-BE49-F238E27FC236}">
+                <a16:creationId xmlns:a16="http://schemas.microsoft.com/office/drawing/2014/main" id="{E9E6E82D-48B5-A57B-3C01-42B3D48673D0}"/>
+              </a:ext>
+            </a:extLst>
+          </p:cNvPr>
+          <p:cNvSpPr/>
+          <p:nvPr/>
+        </p:nvSpPr>
+        <p:spPr>
+          <a:xfrm>
+            <a:off x="8488392" y="0"/>
+            <a:ext cx="3703608" cy="2478657"/>
+          </a:xfrm>
+          <a:prstGeom prst="rect">
+            <a:avLst/>
+          </a:prstGeom>
+          <a:ln>
+            <a:noFill/>
+          </a:ln>
+        </p:spPr>
+        <p:style>
+          <a:lnRef idx="2">
+            <a:schemeClr val="accent1">
+              <a:shade val="15000"/>
+            </a:schemeClr>
+          </a:lnRef>
+          <a:fillRef idx="1">
+            <a:schemeClr val="accent1"/>
+          </a:fillRef>
+          <a:effectRef idx="0">
+            <a:schemeClr val="accent1"/>
+          </a:effectRef>
+          <a:fontRef idx="minor">
+            <a:schemeClr val="lt1"/>
+          </a:fontRef>
+        </p:style>
+        <p:txBody>
+          <a:bodyPr rtlCol="0" anchor="ctr"/>
+          <a:lstStyle/>
+          <a:p>
+            <a:pPr algn="ctr"/>
+            <a:endParaRPr lang="de-CH" dirty="0"/>
+          </a:p>
+        </p:txBody>
+      </p:sp>
+    </p:spTree>
+    <p:extLst>
+      <p:ext uri="{BB962C8B-B14F-4D97-AF65-F5344CB8AC3E}">
+        <p14:creationId xmlns:p14="http://schemas.microsoft.com/office/powerpoint/2010/main" val="1960952147"/>
+      </p:ext>
+    </p:extLst>
+  </p:cSld>
+  <p:clrMapOvr>
+    <a:masterClrMapping/>
+  </p:clrMapOvr>
+</p:sld>
+</file>
+
+<file path=ppt/slides/slide7.xml><?xml version="1.0" encoding="utf-8"?>
+<p:sld xmlns:a="http://schemas.openxmlformats.org/drawingml/2006/main" xmlns:r="http://schemas.openxmlformats.org/officeDocument/2006/relationships" xmlns:p="http://schemas.openxmlformats.org/presentationml/2006/main">
+  <p:cSld>
+    <p:spTree>
+      <p:nvGrpSpPr>
+        <p:cNvPr id="1" name=""/>
+        <p:cNvGrpSpPr/>
+        <p:nvPr/>
+      </p:nvGrpSpPr>
+      <p:grpSpPr>
+        <a:xfrm>
+          <a:off x="0" y="0"/>
+          <a:ext cx="0" cy="0"/>
+          <a:chOff x="0" y="0"/>
+          <a:chExt cx="0" cy="0"/>
+        </a:xfrm>
+      </p:grpSpPr>
+      <p:sp>
+        <p:nvSpPr>
+          <p:cNvPr id="2" name="Titel 1">
+            <a:extLst>
+              <a:ext uri="{FF2B5EF4-FFF2-40B4-BE49-F238E27FC236}">
+                <a16:creationId xmlns:a16="http://schemas.microsoft.com/office/drawing/2014/main" id="{A3991CB8-11FC-8BE0-97EA-BFBE6F1A0984}"/>
+              </a:ext>
+            </a:extLst>
+          </p:cNvPr>
+          <p:cNvSpPr>
+            <a:spLocks noGrp="1"/>
+          </p:cNvSpPr>
+          <p:nvPr>
+            <p:ph type="title"/>
+          </p:nvPr>
+        </p:nvSpPr>
+        <p:spPr/>
+        <p:txBody>
+          <a:bodyPr/>
+          <a:lstStyle/>
+          <a:p>
+            <a:r>
+              <a:rPr lang="de-DE" sz="4200" noProof="1">
+                <a:latin typeface="Aptos Black" panose="020B0004020202020204" pitchFamily="34" charset="0"/>
+              </a:rPr>
+              <a:t>Änderungserkennung</a:t>
+            </a:r>
+            <a:r>
+              <a:rPr lang="de-DE" noProof="1">
+                <a:latin typeface="Aptos Black" panose="020B0004020202020204" pitchFamily="34" charset="0"/>
+              </a:rPr>
+              <a:t> (Hash)</a:t>
+            </a:r>
+          </a:p>
+        </p:txBody>
+      </p:sp>
+      <p:sp>
+        <p:nvSpPr>
+          <p:cNvPr id="3" name="Inhaltsplatzhalter 2">
+            <a:extLst>
+              <a:ext uri="{FF2B5EF4-FFF2-40B4-BE49-F238E27FC236}">
+                <a16:creationId xmlns:a16="http://schemas.microsoft.com/office/drawing/2014/main" id="{3F685CBE-0941-4C20-8E46-D967007ECC92}"/>
+              </a:ext>
+            </a:extLst>
+          </p:cNvPr>
+          <p:cNvSpPr>
+            <a:spLocks noGrp="1"/>
+          </p:cNvSpPr>
+          <p:nvPr>
+            <p:ph idx="1"/>
+          </p:nvPr>
+        </p:nvSpPr>
+        <p:spPr/>
+        <p:txBody>
+          <a:bodyPr/>
+          <a:lstStyle/>
+          <a:p>
+            <a:pPr marL="0" indent="0">
+              <a:buNone/>
+            </a:pPr>
+            <a:r>
+              <a:rPr lang="de-DE" noProof="1">
+                <a:latin typeface="Courier New" pitchFamily="34" charset="0"/>
+                <a:ea typeface="Courier New" pitchFamily="34" charset="-122"/>
+                <a:cs typeface="Courier New" pitchFamily="34" charset="-120"/>
+              </a:rPr>
+              <a:t>get_page_hash() {
+  echo "$1" | </a:t>
+            </a:r>
+            <a:r>
+              <a:rPr lang="de-DE" noProof="1">
+                <a:solidFill>
+                  <a:srgbClr val="39C5CF"/>
+                </a:solidFill>
+                <a:latin typeface="Courier New" pitchFamily="34" charset="0"/>
+                <a:ea typeface="Courier New" pitchFamily="34" charset="-122"/>
+                <a:cs typeface="Courier New" pitchFamily="34" charset="-120"/>
+              </a:rPr>
+              <a:t>sha256sum</a:t>
+            </a:r>
+            <a:r>
+              <a:rPr lang="de-DE" noProof="1">
+                <a:solidFill>
+                  <a:srgbClr val="E6EDF3"/>
+                </a:solidFill>
+                <a:latin typeface="Courier New" pitchFamily="34" charset="0"/>
+                <a:ea typeface="Courier New" pitchFamily="34" charset="-122"/>
+                <a:cs typeface="Courier New" pitchFamily="34" charset="-120"/>
+              </a:rPr>
+              <a:t> </a:t>
+            </a:r>
+            <a:r>
+              <a:rPr lang="de-DE" noProof="1">
+                <a:latin typeface="Courier New" pitchFamily="34" charset="0"/>
+                <a:ea typeface="Courier New" pitchFamily="34" charset="-122"/>
+                <a:cs typeface="Courier New" pitchFamily="34" charset="-120"/>
+              </a:rPr>
+              <a:t>\
+    | awk '{print $1}'
+}</a:t>
+            </a:r>
+            <a:endParaRPr lang="de-DE" noProof="1"/>
+          </a:p>
+          <a:p>
+            <a:pPr marL="0" indent="0">
+              <a:buNone/>
+            </a:pPr>
+            <a:endParaRPr lang="de-DE" noProof="1"/>
+          </a:p>
+        </p:txBody>
+      </p:sp>
+      <p:sp>
+        <p:nvSpPr>
+          <p:cNvPr id="7" name="Rechteck 6">
+            <a:extLst>
+              <a:ext uri="{FF2B5EF4-FFF2-40B4-BE49-F238E27FC236}">
+                <a16:creationId xmlns:a16="http://schemas.microsoft.com/office/drawing/2014/main" id="{43D71B40-6BC8-0365-FD44-8DDBF6C3CABD}"/>
+              </a:ext>
+            </a:extLst>
+          </p:cNvPr>
+          <p:cNvSpPr/>
+          <p:nvPr/>
+        </p:nvSpPr>
+        <p:spPr>
+          <a:xfrm>
+            <a:off x="8488392" y="0"/>
+            <a:ext cx="3703608" cy="2478657"/>
+          </a:xfrm>
+          <a:prstGeom prst="rect">
+            <a:avLst/>
+          </a:prstGeom>
+          <a:ln>
+            <a:noFill/>
+          </a:ln>
+        </p:spPr>
+        <p:style>
+          <a:lnRef idx="2">
+            <a:schemeClr val="accent1">
+              <a:shade val="15000"/>
+            </a:schemeClr>
+          </a:lnRef>
+          <a:fillRef idx="1">
+            <a:schemeClr val="accent1"/>
+          </a:fillRef>
+          <a:effectRef idx="0">
+            <a:schemeClr val="accent1"/>
+          </a:effectRef>
+          <a:fontRef idx="minor">
+            <a:schemeClr val="lt1"/>
+          </a:fontRef>
+        </p:style>
+        <p:txBody>
+          <a:bodyPr rtlCol="0" anchor="ctr"/>
+          <a:lstStyle/>
+          <a:p>
+            <a:pPr algn="ctr"/>
+            <a:endParaRPr lang="de-CH" dirty="0"/>
+          </a:p>
+        </p:txBody>
+      </p:sp>
+    </p:spTree>
+    <p:extLst>
+      <p:ext uri="{BB962C8B-B14F-4D97-AF65-F5344CB8AC3E}">
+        <p14:creationId xmlns:p14="http://schemas.microsoft.com/office/powerpoint/2010/main" val="3203336378"/>
+      </p:ext>
+    </p:extLst>
+  </p:cSld>
+  <p:clrMapOvr>
+    <a:masterClrMapping/>
+  </p:clrMapOvr>
+</p:sld>
+</file>
+
+<file path=ppt/slides/slide8.xml><?xml version="1.0" encoding="utf-8"?>
+<p:sld xmlns:a="http://schemas.openxmlformats.org/drawingml/2006/main" xmlns:r="http://schemas.openxmlformats.org/officeDocument/2006/relationships" xmlns:p="http://schemas.openxmlformats.org/presentationml/2006/main">
+  <p:cSld>
+    <p:spTree>
+      <p:nvGrpSpPr>
+        <p:cNvPr id="1" name=""/>
+        <p:cNvGrpSpPr/>
+        <p:nvPr/>
+      </p:nvGrpSpPr>
+      <p:grpSpPr>
+        <a:xfrm>
+          <a:off x="0" y="0"/>
+          <a:ext cx="0" cy="0"/>
+          <a:chOff x="0" y="0"/>
+          <a:chExt cx="0" cy="0"/>
+        </a:xfrm>
+      </p:grpSpPr>
+      <p:sp>
+        <p:nvSpPr>
+          <p:cNvPr id="2" name="Titel 1">
+            <a:extLst>
+              <a:ext uri="{FF2B5EF4-FFF2-40B4-BE49-F238E27FC236}">
+                <a16:creationId xmlns:a16="http://schemas.microsoft.com/office/drawing/2014/main" id="{FC9503C8-289B-6F50-89B7-25F6C6D969F7}"/>
+              </a:ext>
+            </a:extLst>
+          </p:cNvPr>
+          <p:cNvSpPr>
+            <a:spLocks noGrp="1"/>
+          </p:cNvSpPr>
+          <p:nvPr>
+            <p:ph type="title"/>
+          </p:nvPr>
+        </p:nvSpPr>
+        <p:spPr/>
+        <p:txBody>
+          <a:bodyPr/>
+          <a:lstStyle/>
+          <a:p>
+            <a:r>
+              <a:rPr lang="de-DE" sz="4200" noProof="1">
+                <a:latin typeface="Aptos Black" panose="020B0004020202020204" pitchFamily="34" charset="0"/>
+              </a:rPr>
+              <a:t>Crawl-Schleife</a:t>
+            </a:r>
+            <a:r>
+              <a:rPr lang="de-DE" noProof="1">
+                <a:latin typeface="Aptos Black" panose="020B0004020202020204" pitchFamily="34" charset="0"/>
+              </a:rPr>
+              <a:t> (gekürzt)</a:t>
+            </a:r>
+          </a:p>
+        </p:txBody>
+      </p:sp>
+      <p:sp>
+        <p:nvSpPr>
+          <p:cNvPr id="3" name="Inhaltsplatzhalter 2">
+            <a:extLst>
+              <a:ext uri="{FF2B5EF4-FFF2-40B4-BE49-F238E27FC236}">
+                <a16:creationId xmlns:a16="http://schemas.microsoft.com/office/drawing/2014/main" id="{41AA9467-661D-1E54-A70A-B05D81B14D01}"/>
+              </a:ext>
+            </a:extLst>
+          </p:cNvPr>
+          <p:cNvSpPr>
+            <a:spLocks noGrp="1"/>
+          </p:cNvSpPr>
+          <p:nvPr>
+            <p:ph idx="1"/>
+          </p:nvPr>
+        </p:nvSpPr>
+        <p:spPr/>
+        <p:txBody>
+          <a:bodyPr>
+            <a:normAutofit fontScale="85000" lnSpcReduction="20000"/>
+          </a:bodyPr>
+          <a:lstStyle/>
+          <a:p>
+            <a:pPr marL="0" indent="0">
+              <a:buNone/>
+            </a:pPr>
+            <a:r>
+              <a:rPr lang="de-DE" noProof="1">
+                <a:solidFill>
+                  <a:srgbClr val="3FB950"/>
+                </a:solidFill>
+                <a:latin typeface="Courier New" pitchFamily="34" charset="0"/>
+                <a:ea typeface="Courier New" pitchFamily="34" charset="-122"/>
+                <a:cs typeface="Courier New" pitchFamily="34" charset="-120"/>
+              </a:rPr>
+              <a:t>while</a:t>
+            </a:r>
+            <a:r>
+              <a:rPr lang="de-DE" noProof="1">
+                <a:solidFill>
+                  <a:srgbClr val="E6EDF3"/>
+                </a:solidFill>
+                <a:latin typeface="Courier New" pitchFamily="34" charset="0"/>
+                <a:ea typeface="Courier New" pitchFamily="34" charset="-122"/>
+                <a:cs typeface="Courier New" pitchFamily="34" charset="-120"/>
+              </a:rPr>
+              <a:t> </a:t>
+            </a:r>
+            <a:r>
+              <a:rPr lang="de-DE" noProof="1">
+                <a:latin typeface="Courier New" pitchFamily="34" charset="0"/>
+                <a:ea typeface="Courier New" pitchFamily="34" charset="-122"/>
+                <a:cs typeface="Courier New" pitchFamily="34" charset="-120"/>
+              </a:rPr>
+              <a:t>[[ $page_count -lt $max ]]; </a:t>
+            </a:r>
+            <a:r>
+              <a:rPr lang="de-DE" noProof="1">
+                <a:solidFill>
+                  <a:srgbClr val="3FB950"/>
+                </a:solidFill>
+                <a:latin typeface="Courier New" pitchFamily="34" charset="0"/>
+                <a:ea typeface="Courier New" pitchFamily="34" charset="-122"/>
+                <a:cs typeface="Courier New" pitchFamily="34" charset="-120"/>
+              </a:rPr>
+              <a:t>do
+</a:t>
+            </a:r>
+            <a:r>
+              <a:rPr lang="de-DE" noProof="1">
+                <a:solidFill>
+                  <a:srgbClr val="E6EDF3"/>
+                </a:solidFill>
+                <a:latin typeface="Courier New" pitchFamily="34" charset="0"/>
+                <a:ea typeface="Courier New" pitchFamily="34" charset="-122"/>
+                <a:cs typeface="Courier New" pitchFamily="34" charset="-120"/>
+              </a:rPr>
+              <a:t>  </a:t>
+            </a:r>
+            <a:r>
+              <a:rPr lang="de-DE" noProof="1">
+                <a:latin typeface="Courier New" pitchFamily="34" charset="0"/>
+                <a:ea typeface="Courier New" pitchFamily="34" charset="-122"/>
+                <a:cs typeface="Courier New" pitchFamily="34" charset="-120"/>
+              </a:rPr>
+              <a:t>url=$(</a:t>
+            </a:r>
+            <a:r>
+              <a:rPr lang="de-DE" noProof="1">
+                <a:solidFill>
+                  <a:srgbClr val="39C5CF"/>
+                </a:solidFill>
+                <a:latin typeface="Courier New" pitchFamily="34" charset="0"/>
+                <a:ea typeface="Courier New" pitchFamily="34" charset="-122"/>
+                <a:cs typeface="Courier New" pitchFamily="34" charset="-120"/>
+              </a:rPr>
+              <a:t>sed</a:t>
+            </a:r>
+            <a:r>
+              <a:rPr lang="de-DE" noProof="1">
+                <a:solidFill>
+                  <a:srgbClr val="E6EDF3"/>
+                </a:solidFill>
+                <a:latin typeface="Courier New" pitchFamily="34" charset="0"/>
+                <a:ea typeface="Courier New" pitchFamily="34" charset="-122"/>
+                <a:cs typeface="Courier New" pitchFamily="34" charset="-120"/>
+              </a:rPr>
+              <a:t> </a:t>
+            </a:r>
+            <a:r>
+              <a:rPr lang="de-DE" noProof="1">
+                <a:latin typeface="Courier New" pitchFamily="34" charset="0"/>
+                <a:ea typeface="Courier New" pitchFamily="34" charset="-122"/>
+                <a:cs typeface="Courier New" pitchFamily="34" charset="-120"/>
+              </a:rPr>
+              <a:t>-n "${pos}p" $QUEUE)</a:t>
+            </a:r>
+            <a:r>
+              <a:rPr lang="de-DE" noProof="1">
+                <a:solidFill>
+                  <a:srgbClr val="E6EDF3"/>
+                </a:solidFill>
+                <a:latin typeface="Courier New" pitchFamily="34" charset="0"/>
+                <a:ea typeface="Courier New" pitchFamily="34" charset="-122"/>
+                <a:cs typeface="Courier New" pitchFamily="34" charset="-120"/>
+              </a:rPr>
+              <a:t>
+</a:t>
+            </a:r>
+            <a:r>
+              <a:rPr lang="de-DE" noProof="1">
+                <a:solidFill>
+                  <a:srgbClr val="3FB950"/>
+                </a:solidFill>
+                <a:latin typeface="Courier New" pitchFamily="34" charset="0"/>
+                <a:ea typeface="Courier New" pitchFamily="34" charset="-122"/>
+                <a:cs typeface="Courier New" pitchFamily="34" charset="-120"/>
+              </a:rPr>
+              <a:t>  is_valid_url</a:t>
+            </a:r>
+            <a:r>
+              <a:rPr lang="de-DE" noProof="1">
+                <a:solidFill>
+                  <a:srgbClr val="E6EDF3"/>
+                </a:solidFill>
+                <a:latin typeface="Courier New" pitchFamily="34" charset="0"/>
+                <a:ea typeface="Courier New" pitchFamily="34" charset="-122"/>
+                <a:cs typeface="Courier New" pitchFamily="34" charset="-120"/>
+              </a:rPr>
+              <a:t> </a:t>
+            </a:r>
+            <a:r>
+              <a:rPr lang="de-DE" noProof="1">
+                <a:latin typeface="Courier New" pitchFamily="34" charset="0"/>
+                <a:ea typeface="Courier New" pitchFamily="34" charset="-122"/>
+                <a:cs typeface="Courier New" pitchFamily="34" charset="-120"/>
+              </a:rPr>
+              <a:t>"$url" || </a:t>
+            </a:r>
+            <a:r>
+              <a:rPr lang="de-DE" noProof="1">
+                <a:solidFill>
+                  <a:srgbClr val="3FB950"/>
+                </a:solidFill>
+                <a:latin typeface="Courier New" pitchFamily="34" charset="0"/>
+                <a:ea typeface="Courier New" pitchFamily="34" charset="-122"/>
+                <a:cs typeface="Courier New" pitchFamily="34" charset="-120"/>
+              </a:rPr>
+              <a:t>continue
+</a:t>
+            </a:r>
+            <a:r>
+              <a:rPr lang="de-DE" noProof="1">
+                <a:solidFill>
+                  <a:srgbClr val="E6EDF3"/>
+                </a:solidFill>
+                <a:latin typeface="Courier New" pitchFamily="34" charset="0"/>
+                <a:ea typeface="Courier New" pitchFamily="34" charset="-122"/>
+                <a:cs typeface="Courier New" pitchFamily="34" charset="-120"/>
+              </a:rPr>
+              <a:t>
+</a:t>
+            </a:r>
+            <a:r>
+              <a:rPr lang="de-DE" noProof="1">
+                <a:solidFill>
+                  <a:srgbClr val="3FB950"/>
+                </a:solidFill>
+                <a:latin typeface="Courier New" pitchFamily="34" charset="0"/>
+                <a:ea typeface="Courier New" pitchFamily="34" charset="-122"/>
+                <a:cs typeface="Courier New" pitchFamily="34" charset="-120"/>
+              </a:rPr>
+              <a:t>  mark_visited</a:t>
+            </a:r>
+            <a:r>
+              <a:rPr lang="de-DE" noProof="1">
+                <a:solidFill>
+                  <a:srgbClr val="E6EDF3"/>
+                </a:solidFill>
+                <a:latin typeface="Courier New" pitchFamily="34" charset="0"/>
+                <a:ea typeface="Courier New" pitchFamily="34" charset="-122"/>
+                <a:cs typeface="Courier New" pitchFamily="34" charset="-120"/>
+              </a:rPr>
+              <a:t> </a:t>
+            </a:r>
+            <a:r>
+              <a:rPr lang="de-DE" noProof="1">
+                <a:latin typeface="Courier New" pitchFamily="34" charset="0"/>
+                <a:ea typeface="Courier New" pitchFamily="34" charset="-122"/>
+                <a:cs typeface="Courier New" pitchFamily="34" charset="-120"/>
+              </a:rPr>
+              <a:t>"$url"
+  html=$(</a:t>
+            </a:r>
+            <a:r>
+              <a:rPr lang="de-DE" noProof="1">
+                <a:solidFill>
+                  <a:srgbClr val="39C5CF"/>
+                </a:solidFill>
+                <a:latin typeface="Courier New" pitchFamily="34" charset="0"/>
+                <a:ea typeface="Courier New" pitchFamily="34" charset="-122"/>
+                <a:cs typeface="Courier New" pitchFamily="34" charset="-120"/>
+              </a:rPr>
+              <a:t>curl</a:t>
+            </a:r>
+            <a:r>
+              <a:rPr lang="de-DE" noProof="1">
+                <a:solidFill>
+                  <a:srgbClr val="E6EDF3"/>
+                </a:solidFill>
+                <a:latin typeface="Courier New" pitchFamily="34" charset="0"/>
+                <a:ea typeface="Courier New" pitchFamily="34" charset="-122"/>
+                <a:cs typeface="Courier New" pitchFamily="34" charset="-120"/>
+              </a:rPr>
+              <a:t> </a:t>
+            </a:r>
+            <a:r>
+              <a:rPr lang="de-DE" noProof="1">
+                <a:latin typeface="Courier New" pitchFamily="34" charset="0"/>
+                <a:ea typeface="Courier New" pitchFamily="34" charset="-122"/>
+                <a:cs typeface="Courier New" pitchFamily="34" charset="-120"/>
+              </a:rPr>
+              <a:t>-sL "$url")</a:t>
+            </a:r>
+            <a:r>
+              <a:rPr lang="de-DE" noProof="1">
+                <a:solidFill>
+                  <a:srgbClr val="E6EDF3"/>
+                </a:solidFill>
+                <a:latin typeface="Courier New" pitchFamily="34" charset="0"/>
+                <a:ea typeface="Courier New" pitchFamily="34" charset="-122"/>
+                <a:cs typeface="Courier New" pitchFamily="34" charset="-120"/>
+              </a:rPr>
+              <a:t>
+  </a:t>
+            </a:r>
+            <a:r>
+              <a:rPr lang="de-DE" noProof="1">
+                <a:latin typeface="Courier New" pitchFamily="34" charset="0"/>
+                <a:ea typeface="Courier New" pitchFamily="34" charset="-122"/>
+                <a:cs typeface="Courier New" pitchFamily="34" charset="-120"/>
+              </a:rPr>
+              <a:t>hash=$(</a:t>
+            </a:r>
+            <a:r>
+              <a:rPr lang="de-DE" noProof="1">
+                <a:solidFill>
+                  <a:srgbClr val="3FB950"/>
+                </a:solidFill>
+                <a:latin typeface="Courier New" pitchFamily="34" charset="0"/>
+                <a:ea typeface="Courier New" pitchFamily="34" charset="-122"/>
+                <a:cs typeface="Courier New" pitchFamily="34" charset="-120"/>
+              </a:rPr>
+              <a:t>get_page_hash</a:t>
+            </a:r>
+            <a:r>
+              <a:rPr lang="de-DE" noProof="1">
+                <a:solidFill>
+                  <a:srgbClr val="E6EDF3"/>
+                </a:solidFill>
+                <a:latin typeface="Courier New" pitchFamily="34" charset="0"/>
+                <a:ea typeface="Courier New" pitchFamily="34" charset="-122"/>
+                <a:cs typeface="Courier New" pitchFamily="34" charset="-120"/>
+              </a:rPr>
+              <a:t> </a:t>
+            </a:r>
+            <a:r>
+              <a:rPr lang="de-DE" noProof="1">
+                <a:latin typeface="Courier New" pitchFamily="34" charset="0"/>
+                <a:ea typeface="Courier New" pitchFamily="34" charset="-122"/>
+                <a:cs typeface="Courier New" pitchFamily="34" charset="-120"/>
+              </a:rPr>
+              <a:t>"$html")</a:t>
+            </a:r>
+            <a:r>
+              <a:rPr lang="de-DE" noProof="1">
+                <a:solidFill>
+                  <a:srgbClr val="8B949E"/>
+                </a:solidFill>
+                <a:latin typeface="Courier New" pitchFamily="34" charset="0"/>
+                <a:ea typeface="Courier New" pitchFamily="34" charset="-122"/>
+                <a:cs typeface="Courier New" pitchFamily="34" charset="-120"/>
+              </a:rPr>
+              <a:t>
+</a:t>
+            </a:r>
+            <a:r>
+              <a:rPr lang="de-DE" noProof="1">
+                <a:solidFill>
+                  <a:srgbClr val="E6EDF3"/>
+                </a:solidFill>
+                <a:latin typeface="Courier New" pitchFamily="34" charset="0"/>
+                <a:ea typeface="Courier New" pitchFamily="34" charset="-122"/>
+                <a:cs typeface="Courier New" pitchFamily="34" charset="-120"/>
+              </a:rPr>
+              <a:t>
+</a:t>
+            </a:r>
+            <a:r>
+              <a:rPr lang="de-DE" noProof="1">
+                <a:solidFill>
+                  <a:srgbClr val="3FB950"/>
+                </a:solidFill>
+                <a:latin typeface="Courier New" pitchFamily="34" charset="0"/>
+                <a:ea typeface="Courier New" pitchFamily="34" charset="-122"/>
+                <a:cs typeface="Courier New" pitchFamily="34" charset="-120"/>
+              </a:rPr>
+              <a:t>  extract_links</a:t>
+            </a:r>
+            <a:r>
+              <a:rPr lang="de-DE" noProof="1">
+                <a:solidFill>
+                  <a:srgbClr val="E6EDF3"/>
+                </a:solidFill>
+                <a:latin typeface="Courier New" pitchFamily="34" charset="0"/>
+                <a:ea typeface="Courier New" pitchFamily="34" charset="-122"/>
+                <a:cs typeface="Courier New" pitchFamily="34" charset="-120"/>
+              </a:rPr>
+              <a:t> </a:t>
+            </a:r>
+            <a:r>
+              <a:rPr lang="de-DE" noProof="1">
+                <a:latin typeface="Courier New" pitchFamily="34" charset="0"/>
+                <a:ea typeface="Courier New" pitchFamily="34" charset="-122"/>
+                <a:cs typeface="Courier New" pitchFamily="34" charset="-120"/>
+              </a:rPr>
+              <a:t>"$url" "$html" \
+    | </a:t>
+            </a:r>
+            <a:r>
+              <a:rPr lang="de-DE" noProof="1">
+                <a:solidFill>
+                  <a:srgbClr val="3FB950"/>
+                </a:solidFill>
+                <a:latin typeface="Courier New" pitchFamily="34" charset="0"/>
+                <a:ea typeface="Courier New" pitchFamily="34" charset="-122"/>
+                <a:cs typeface="Courier New" pitchFamily="34" charset="-120"/>
+              </a:rPr>
+              <a:t>add_to_queue
+done</a:t>
+            </a:r>
+            <a:endParaRPr lang="de-DE" noProof="1"/>
+          </a:p>
+          <a:p>
+            <a:pPr marL="0" indent="0">
+              <a:buNone/>
+            </a:pPr>
+            <a:endParaRPr lang="de-DE" noProof="1"/>
+          </a:p>
+        </p:txBody>
+      </p:sp>
+      <p:sp>
+        <p:nvSpPr>
+          <p:cNvPr id="7" name="Rechteck 6">
+            <a:extLst>
+              <a:ext uri="{FF2B5EF4-FFF2-40B4-BE49-F238E27FC236}">
+                <a16:creationId xmlns:a16="http://schemas.microsoft.com/office/drawing/2014/main" id="{0FFDD6DE-8384-BFFF-2ECA-81E6003E5ECF}"/>
+              </a:ext>
+            </a:extLst>
+          </p:cNvPr>
+          <p:cNvSpPr/>
+          <p:nvPr/>
+        </p:nvSpPr>
+        <p:spPr>
+          <a:xfrm>
+            <a:off x="8488392" y="0"/>
+            <a:ext cx="3703608" cy="2478657"/>
+          </a:xfrm>
+          <a:prstGeom prst="rect">
+            <a:avLst/>
+          </a:prstGeom>
+          <a:ln>
+            <a:noFill/>
+          </a:ln>
+        </p:spPr>
+        <p:style>
+          <a:lnRef idx="2">
+            <a:schemeClr val="accent1">
+              <a:shade val="15000"/>
+            </a:schemeClr>
+          </a:lnRef>
+          <a:fillRef idx="1">
+            <a:schemeClr val="accent1"/>
+          </a:fillRef>
+          <a:effectRef idx="0">
+            <a:schemeClr val="accent1"/>
+          </a:effectRef>
+          <a:fontRef idx="minor">
+            <a:schemeClr val="lt1"/>
+          </a:fontRef>
+        </p:style>
+        <p:txBody>
+          <a:bodyPr rtlCol="0" anchor="ctr"/>
+          <a:lstStyle/>
+          <a:p>
+            <a:pPr algn="ctr"/>
+            <a:endParaRPr lang="de-CH" dirty="0"/>
+          </a:p>
+        </p:txBody>
+      </p:sp>
+    </p:spTree>
+    <p:extLst>
+      <p:ext uri="{BB962C8B-B14F-4D97-AF65-F5344CB8AC3E}">
+        <p14:creationId xmlns:p14="http://schemas.microsoft.com/office/powerpoint/2010/main" val="3342069315"/>
+      </p:ext>
+    </p:extLst>
+  </p:cSld>
+  <p:clrMapOvr>
+    <a:masterClrMapping/>
+  </p:clrMapOvr>
+</p:sld>
+</file>
+
+<file path=ppt/slides/slide9.xml><?xml version="1.0" encoding="utf-8"?>
+<p:sld xmlns:a="http://schemas.openxmlformats.org/drawingml/2006/main" xmlns:r="http://schemas.openxmlformats.org/officeDocument/2006/relationships" xmlns:p="http://schemas.openxmlformats.org/presentationml/2006/main">
+  <p:cSld>
+    <p:spTree>
+      <p:nvGrpSpPr>
+        <p:cNvPr id="1" name=""/>
+        <p:cNvGrpSpPr/>
+        <p:nvPr/>
+      </p:nvGrpSpPr>
+      <p:grpSpPr>
+        <a:xfrm>
+          <a:off x="0" y="0"/>
+          <a:ext cx="0" cy="0"/>
+          <a:chOff x="0" y="0"/>
+          <a:chExt cx="0" cy="0"/>
+        </a:xfrm>
+      </p:grpSpPr>
+      <p:sp>
+        <p:nvSpPr>
+          <p:cNvPr id="2" name="Titel 1">
+            <a:extLst>
+              <a:ext uri="{FF2B5EF4-FFF2-40B4-BE49-F238E27FC236}">
+                <a16:creationId xmlns:a16="http://schemas.microsoft.com/office/drawing/2014/main" id="{6B0DC9F4-38EA-91CC-46BF-9094A6475485}"/>
+              </a:ext>
+            </a:extLst>
+          </p:cNvPr>
+          <p:cNvSpPr>
+            <a:spLocks noGrp="1"/>
+          </p:cNvSpPr>
+          <p:nvPr>
+            <p:ph type="title"/>
+          </p:nvPr>
+        </p:nvSpPr>
+        <p:spPr>
+          <a:xfrm>
+            <a:off x="567906" y="388129"/>
+            <a:ext cx="10515600" cy="1325563"/>
+          </a:xfrm>
+        </p:spPr>
+        <p:txBody>
+          <a:bodyPr>
+            <a:normAutofit/>
+          </a:bodyPr>
+          <a:lstStyle/>
+          <a:p>
+            <a:r>
+              <a:rPr lang="de-DE" sz="4200" noProof="1">
+                <a:latin typeface="Aptos Black" panose="020B0004020202020204" pitchFamily="34" charset="0"/>
+              </a:rPr>
+              <a:t>Testumgebung</a:t>
+            </a:r>
+          </a:p>
+        </p:txBody>
+      </p:sp>
+      <p:sp>
+        <p:nvSpPr>
+          <p:cNvPr id="3" name="Inhaltsplatzhalter 2">
+            <a:extLst>
+              <a:ext uri="{FF2B5EF4-FFF2-40B4-BE49-F238E27FC236}">
+                <a16:creationId xmlns:a16="http://schemas.microsoft.com/office/drawing/2014/main" id="{64B4DD72-E8CC-B10E-95E5-6F1A995E1367}"/>
+              </a:ext>
+            </a:extLst>
+          </p:cNvPr>
+          <p:cNvSpPr>
+            <a:spLocks noGrp="1"/>
+          </p:cNvSpPr>
+          <p:nvPr>
+            <p:ph idx="1"/>
+          </p:nvPr>
+        </p:nvSpPr>
+        <p:spPr>
+          <a:xfrm>
+            <a:off x="567906" y="1894637"/>
+            <a:ext cx="10515600" cy="4351338"/>
+          </a:xfrm>
+        </p:spPr>
+        <p:txBody>
+          <a:bodyPr/>
+          <a:lstStyle/>
+          <a:p>
+            <a:r>
+              <a:rPr lang="de-DE" sz="2600" noProof="1">
+                <a:latin typeface="Aptos Black" panose="020B0004020202020204" pitchFamily="34" charset="0"/>
+              </a:rPr>
+              <a:t>Lokale Test-Website</a:t>
+            </a:r>
+          </a:p>
+          <a:p>
+            <a:pPr lvl="1"/>
+            <a:r>
+              <a:rPr lang="de-DE" sz="2200" noProof="1">
+                <a:latin typeface="Aptos Black" panose="020B0004020202020204" pitchFamily="34" charset="0"/>
+              </a:rPr>
+              <a:t>Kontrollierte Umgebung, um jede Funktion zu prüfen</a:t>
+            </a:r>
+          </a:p>
+          <a:p>
+            <a:pPr lvl="2"/>
+            <a:r>
+              <a:rPr lang="de-DE" noProof="1">
+                <a:latin typeface="Aptos Black" panose="020B0004020202020204" pitchFamily="34" charset="0"/>
+              </a:rPr>
+              <a:t>index, about, products, contacts</a:t>
+            </a:r>
+          </a:p>
+          <a:p>
+            <a:pPr lvl="3"/>
+            <a:r>
+              <a:rPr lang="de-DE" noProof="1">
+                <a:latin typeface="Aptos Black" panose="020B0004020202020204" pitchFamily="34" charset="0"/>
+              </a:rPr>
+              <a:t>Normale, verlinkte Seiten</a:t>
+            </a:r>
+          </a:p>
+          <a:p>
+            <a:pPr lvl="2"/>
+            <a:r>
+              <a:rPr lang="de-DE" noProof="1">
+                <a:latin typeface="Aptos Black" panose="020B0004020202020204" pitchFamily="34" charset="0"/>
+              </a:rPr>
+              <a:t>loop_a </a:t>
+            </a:r>
+            <a:r>
+              <a:rPr lang="de-DE" b="1" noProof="1">
+                <a:latin typeface="Aptos Black" panose="020B0004020202020204" pitchFamily="34" charset="0"/>
+                <a:ea typeface="Courier New" pitchFamily="34" charset="-122"/>
+                <a:cs typeface="Courier New" pitchFamily="34" charset="-120"/>
+              </a:rPr>
+              <a:t>⇄ </a:t>
+            </a:r>
+            <a:r>
+              <a:rPr lang="de-DE" noProof="1">
+                <a:latin typeface="Aptos Black" panose="020B0004020202020204" pitchFamily="34" charset="0"/>
+                <a:ea typeface="Courier New" pitchFamily="34" charset="-122"/>
+                <a:cs typeface="Courier New" pitchFamily="34" charset="-120"/>
+              </a:rPr>
+              <a:t>loop_b</a:t>
+            </a:r>
+          </a:p>
+          <a:p>
+            <a:pPr lvl="3"/>
+            <a:r>
+              <a:rPr lang="de-DE" noProof="1">
+                <a:latin typeface="Aptos Black" panose="020B0004020202020204" pitchFamily="34" charset="0"/>
+                <a:cs typeface="Courier New" pitchFamily="34" charset="-120"/>
+              </a:rPr>
+              <a:t>Testen den Endlosschleifen-Schutz</a:t>
+            </a:r>
+          </a:p>
+          <a:p>
+            <a:pPr lvl="2"/>
+            <a:r>
+              <a:rPr lang="de-DE" noProof="1">
+                <a:latin typeface="Aptos Black" panose="020B0004020202020204" pitchFamily="34" charset="0"/>
+                <a:cs typeface="Courier New" pitchFamily="34" charset="-120"/>
+              </a:rPr>
+              <a:t>change_page</a:t>
+            </a:r>
+          </a:p>
+          <a:p>
+            <a:pPr lvl="3"/>
+            <a:r>
+              <a:rPr lang="de-DE" noProof="1">
+                <a:latin typeface="Aptos Black" panose="020B0004020202020204" pitchFamily="34" charset="0"/>
+                <a:cs typeface="Courier New" pitchFamily="34" charset="-120"/>
+              </a:rPr>
+              <a:t>Inhalt ändern: Hash-Vergleich</a:t>
+            </a:r>
+            <a:endParaRPr lang="de-DE" noProof="1">
+              <a:latin typeface="Aptos Black" panose="020B0004020202020204" pitchFamily="34" charset="0"/>
+            </a:endParaRPr>
+          </a:p>
+        </p:txBody>
+      </p:sp>
+      <p:sp>
+        <p:nvSpPr>
+          <p:cNvPr id="7" name="Rechteck 6">
+            <a:extLst>
+              <a:ext uri="{FF2B5EF4-FFF2-40B4-BE49-F238E27FC236}">
+                <a16:creationId xmlns:a16="http://schemas.microsoft.com/office/drawing/2014/main" id="{46D311B6-0429-E68C-A75A-FD1838A710D2}"/>
+              </a:ext>
+            </a:extLst>
+          </p:cNvPr>
+          <p:cNvSpPr/>
+          <p:nvPr/>
+        </p:nvSpPr>
+        <p:spPr>
+          <a:xfrm>
+            <a:off x="8488392" y="0"/>
+            <a:ext cx="3703608" cy="2478657"/>
+          </a:xfrm>
+          <a:prstGeom prst="rect">
+            <a:avLst/>
+          </a:prstGeom>
+          <a:ln>
+            <a:noFill/>
+          </a:ln>
+        </p:spPr>
+        <p:style>
+          <a:lnRef idx="2">
+            <a:schemeClr val="accent1">
+              <a:shade val="15000"/>
+            </a:schemeClr>
+          </a:lnRef>
+          <a:fillRef idx="1">
+            <a:schemeClr val="accent1"/>
+          </a:fillRef>
+          <a:effectRef idx="0">
+            <a:schemeClr val="accent1"/>
+          </a:effectRef>
+          <a:fontRef idx="minor">
+            <a:schemeClr val="lt1"/>
+          </a:fontRef>
+        </p:style>
+        <p:txBody>
+          <a:bodyPr rtlCol="0" anchor="ctr"/>
+          <a:lstStyle/>
+          <a:p>
+            <a:pPr algn="ctr"/>
+            <a:endParaRPr lang="de-CH" dirty="0"/>
+          </a:p>
+        </p:txBody>
+      </p:sp>
+    </p:spTree>
+    <p:extLst>
+      <p:ext uri="{BB962C8B-B14F-4D97-AF65-F5344CB8AC3E}">
+        <p14:creationId xmlns:p14="http://schemas.microsoft.com/office/powerpoint/2010/main" val="2686510567"/>
       </p:ext>
     </p:extLst>
   </p:cSld>
